--- a/ThesisChapter4Plots/Ch4-Complex-Slope.pptx
+++ b/ThesisChapter4Plots/Ch4-Complex-Slope.pptx
@@ -104,7 +104,49 @@
       </a:defRPr>
     </a:lvl9pPr>
   </p:defaultTextStyle>
+  <p:extLst>
+    <p:ext uri="{EFAFB233-063F-42B5-8137-9DF3F51BA10A}">
+      <p15:sldGuideLst xmlns:p15="http://schemas.microsoft.com/office/powerpoint/2012/main"/>
+    </p:ext>
+  </p:extLst>
 </p:presentation>
+</file>
+
+<file path=ppt/changesInfos/changesInfo1.xml><?xml version="1.0" encoding="utf-8"?>
+<pc:chgInfo xmlns:a="http://schemas.openxmlformats.org/drawingml/2006/main" xmlns:r="http://schemas.openxmlformats.org/officeDocument/2006/relationships" xmlns:ac="http://schemas.microsoft.com/office/drawing/2013/main/command" xmlns:pc="http://schemas.microsoft.com/office/powerpoint/2013/main/command">
+  <pc:docChgLst>
+    <pc:chgData name="KONGKAEW, PUTTIWAT" userId="a8adac1e-848f-4d84-b961-6a7ffb648b49" providerId="ADAL" clId="{83C320FD-E7C7-4FF7-B435-4B1C1BE0BAA2}"/>
+    <pc:docChg chg="modSld">
+      <pc:chgData name="KONGKAEW, PUTTIWAT" userId="a8adac1e-848f-4d84-b961-6a7ffb648b49" providerId="ADAL" clId="{83C320FD-E7C7-4FF7-B435-4B1C1BE0BAA2}" dt="2025-01-17T14:16:18.493" v="2" actId="1035"/>
+      <pc:docMkLst>
+        <pc:docMk/>
+      </pc:docMkLst>
+      <pc:sldChg chg="modSp mod">
+        <pc:chgData name="KONGKAEW, PUTTIWAT" userId="a8adac1e-848f-4d84-b961-6a7ffb648b49" providerId="ADAL" clId="{83C320FD-E7C7-4FF7-B435-4B1C1BE0BAA2}" dt="2025-01-17T14:16:18.493" v="2" actId="1035"/>
+        <pc:sldMkLst>
+          <pc:docMk/>
+          <pc:sldMk cId="1236175979" sldId="256"/>
+        </pc:sldMkLst>
+        <pc:cxnChg chg="mod ord">
+          <ac:chgData name="KONGKAEW, PUTTIWAT" userId="a8adac1e-848f-4d84-b961-6a7ffb648b49" providerId="ADAL" clId="{83C320FD-E7C7-4FF7-B435-4B1C1BE0BAA2}" dt="2025-01-17T14:16:18.493" v="2" actId="1035"/>
+          <ac:cxnSpMkLst>
+            <pc:docMk/>
+            <pc:sldMk cId="1236175979" sldId="256"/>
+            <ac:cxnSpMk id="6" creationId="{A9B8FDD6-D56F-87F2-7A6E-B22D8EE5DFA9}"/>
+          </ac:cxnSpMkLst>
+        </pc:cxnChg>
+        <pc:cxnChg chg="ord">
+          <ac:chgData name="KONGKAEW, PUTTIWAT" userId="a8adac1e-848f-4d84-b961-6a7ffb648b49" providerId="ADAL" clId="{83C320FD-E7C7-4FF7-B435-4B1C1BE0BAA2}" dt="2025-01-17T14:16:08.491" v="0" actId="166"/>
+          <ac:cxnSpMkLst>
+            <pc:docMk/>
+            <pc:sldMk cId="1236175979" sldId="256"/>
+            <ac:cxnSpMk id="7" creationId="{1358BA93-C066-AFA1-B2CA-E9E3BF4965AA}"/>
+          </ac:cxnSpMkLst>
+        </pc:cxnChg>
+      </pc:sldChg>
+    </pc:docChg>
+  </pc:docChgLst>
+</pc:chgInfo>
 </file>
 
 <file path=ppt/slideLayouts/slideLayout1.xml><?xml version="1.0" encoding="utf-8"?>
@@ -238,7 +280,7 @@
           <a:p>
             <a:fld id="{7BDAFD69-69F2-4D92-9879-C317D215C6C9}" type="datetimeFigureOut">
               <a:rPr lang="en-US" smtClean="0"/>
-              <a:t>11/2/2024</a:t>
+              <a:t>1/17/2025</a:t>
             </a:fld>
             <a:endParaRPr lang="en-US"/>
           </a:p>
@@ -408,7 +450,7 @@
           <a:p>
             <a:fld id="{7BDAFD69-69F2-4D92-9879-C317D215C6C9}" type="datetimeFigureOut">
               <a:rPr lang="en-US" smtClean="0"/>
-              <a:t>11/2/2024</a:t>
+              <a:t>1/17/2025</a:t>
             </a:fld>
             <a:endParaRPr lang="en-US"/>
           </a:p>
@@ -588,7 +630,7 @@
           <a:p>
             <a:fld id="{7BDAFD69-69F2-4D92-9879-C317D215C6C9}" type="datetimeFigureOut">
               <a:rPr lang="en-US" smtClean="0"/>
-              <a:t>11/2/2024</a:t>
+              <a:t>1/17/2025</a:t>
             </a:fld>
             <a:endParaRPr lang="en-US"/>
           </a:p>
@@ -758,7 +800,7 @@
           <a:p>
             <a:fld id="{7BDAFD69-69F2-4D92-9879-C317D215C6C9}" type="datetimeFigureOut">
               <a:rPr lang="en-US" smtClean="0"/>
-              <a:t>11/2/2024</a:t>
+              <a:t>1/17/2025</a:t>
             </a:fld>
             <a:endParaRPr lang="en-US"/>
           </a:p>
@@ -1004,7 +1046,7 @@
           <a:p>
             <a:fld id="{7BDAFD69-69F2-4D92-9879-C317D215C6C9}" type="datetimeFigureOut">
               <a:rPr lang="en-US" smtClean="0"/>
-              <a:t>11/2/2024</a:t>
+              <a:t>1/17/2025</a:t>
             </a:fld>
             <a:endParaRPr lang="en-US"/>
           </a:p>
@@ -1236,7 +1278,7 @@
           <a:p>
             <a:fld id="{7BDAFD69-69F2-4D92-9879-C317D215C6C9}" type="datetimeFigureOut">
               <a:rPr lang="en-US" smtClean="0"/>
-              <a:t>11/2/2024</a:t>
+              <a:t>1/17/2025</a:t>
             </a:fld>
             <a:endParaRPr lang="en-US"/>
           </a:p>
@@ -1603,7 +1645,7 @@
           <a:p>
             <a:fld id="{7BDAFD69-69F2-4D92-9879-C317D215C6C9}" type="datetimeFigureOut">
               <a:rPr lang="en-US" smtClean="0"/>
-              <a:t>11/2/2024</a:t>
+              <a:t>1/17/2025</a:t>
             </a:fld>
             <a:endParaRPr lang="en-US"/>
           </a:p>
@@ -1721,7 +1763,7 @@
           <a:p>
             <a:fld id="{7BDAFD69-69F2-4D92-9879-C317D215C6C9}" type="datetimeFigureOut">
               <a:rPr lang="en-US" smtClean="0"/>
-              <a:t>11/2/2024</a:t>
+              <a:t>1/17/2025</a:t>
             </a:fld>
             <a:endParaRPr lang="en-US"/>
           </a:p>
@@ -1816,7 +1858,7 @@
           <a:p>
             <a:fld id="{7BDAFD69-69F2-4D92-9879-C317D215C6C9}" type="datetimeFigureOut">
               <a:rPr lang="en-US" smtClean="0"/>
-              <a:t>11/2/2024</a:t>
+              <a:t>1/17/2025</a:t>
             </a:fld>
             <a:endParaRPr lang="en-US"/>
           </a:p>
@@ -2093,7 +2135,7 @@
           <a:p>
             <a:fld id="{7BDAFD69-69F2-4D92-9879-C317D215C6C9}" type="datetimeFigureOut">
               <a:rPr lang="en-US" smtClean="0"/>
-              <a:t>11/2/2024</a:t>
+              <a:t>1/17/2025</a:t>
             </a:fld>
             <a:endParaRPr lang="en-US"/>
           </a:p>
@@ -2350,7 +2392,7 @@
           <a:p>
             <a:fld id="{7BDAFD69-69F2-4D92-9879-C317D215C6C9}" type="datetimeFigureOut">
               <a:rPr lang="en-US" smtClean="0"/>
-              <a:t>11/2/2024</a:t>
+              <a:t>1/17/2025</a:t>
             </a:fld>
             <a:endParaRPr lang="en-US"/>
           </a:p>
@@ -2563,7 +2605,7 @@
           <a:p>
             <a:fld id="{7BDAFD69-69F2-4D92-9879-C317D215C6C9}" type="datetimeFigureOut">
               <a:rPr lang="en-US" smtClean="0"/>
-              <a:t>11/2/2024</a:t>
+              <a:t>1/17/2025</a:t>
             </a:fld>
             <a:endParaRPr lang="en-US"/>
           </a:p>
@@ -3039,92 +3081,6 @@
             </a:p>
           </p:txBody>
         </p:sp>
-        <p:cxnSp>
-          <p:nvCxnSpPr>
-            <p:cNvPr id="6" name="Straight Connector 5">
-              <a:extLst>
-                <a:ext uri="{FF2B5EF4-FFF2-40B4-BE49-F238E27FC236}">
-                  <a16:creationId xmlns:a16="http://schemas.microsoft.com/office/drawing/2014/main" id="{A9B8FDD6-D56F-87F2-7A6E-B22D8EE5DFA9}"/>
-                </a:ext>
-              </a:extLst>
-            </p:cNvPr>
-            <p:cNvCxnSpPr>
-              <a:cxnSpLocks/>
-            </p:cNvCxnSpPr>
-            <p:nvPr/>
-          </p:nvCxnSpPr>
-          <p:spPr>
-            <a:xfrm>
-              <a:off x="1750740" y="2424000"/>
-              <a:ext cx="3600000" cy="0"/>
-            </a:xfrm>
-            <a:prstGeom prst="line">
-              <a:avLst/>
-            </a:prstGeom>
-            <a:ln>
-              <a:solidFill>
-                <a:schemeClr val="tx1"/>
-              </a:solidFill>
-            </a:ln>
-          </p:spPr>
-          <p:style>
-            <a:lnRef idx="2">
-              <a:schemeClr val="accent1"/>
-            </a:lnRef>
-            <a:fillRef idx="0">
-              <a:schemeClr val="accent1"/>
-            </a:fillRef>
-            <a:effectRef idx="1">
-              <a:schemeClr val="accent1"/>
-            </a:effectRef>
-            <a:fontRef idx="minor">
-              <a:schemeClr val="tx1"/>
-            </a:fontRef>
-          </p:style>
-        </p:cxnSp>
-        <p:cxnSp>
-          <p:nvCxnSpPr>
-            <p:cNvPr id="7" name="Straight Connector 6">
-              <a:extLst>
-                <a:ext uri="{FF2B5EF4-FFF2-40B4-BE49-F238E27FC236}">
-                  <a16:creationId xmlns:a16="http://schemas.microsoft.com/office/drawing/2014/main" id="{1358BA93-C066-AFA1-B2CA-E9E3BF4965AA}"/>
-                </a:ext>
-              </a:extLst>
-            </p:cNvPr>
-            <p:cNvCxnSpPr>
-              <a:cxnSpLocks/>
-            </p:cNvCxnSpPr>
-            <p:nvPr/>
-          </p:nvCxnSpPr>
-          <p:spPr>
-            <a:xfrm>
-              <a:off x="3550740" y="624000"/>
-              <a:ext cx="0" cy="3600000"/>
-            </a:xfrm>
-            <a:prstGeom prst="line">
-              <a:avLst/>
-            </a:prstGeom>
-            <a:ln>
-              <a:solidFill>
-                <a:schemeClr val="tx1"/>
-              </a:solidFill>
-            </a:ln>
-          </p:spPr>
-          <p:style>
-            <a:lnRef idx="2">
-              <a:schemeClr val="accent1"/>
-            </a:lnRef>
-            <a:fillRef idx="0">
-              <a:schemeClr val="accent1"/>
-            </a:fillRef>
-            <a:effectRef idx="1">
-              <a:schemeClr val="accent1"/>
-            </a:effectRef>
-            <a:fontRef idx="minor">
-              <a:schemeClr val="tx1"/>
-            </a:fontRef>
-          </p:style>
-        </p:cxnSp>
         <p:sp>
           <p:nvSpPr>
             <p:cNvPr id="14" name="TextBox 13">
@@ -3160,8 +3116,8 @@
             </a:p>
           </p:txBody>
         </p:sp>
-        <mc:AlternateContent xmlns:mc="http://schemas.openxmlformats.org/markup-compatibility/2006">
-          <mc:Choice xmlns:a14="http://schemas.microsoft.com/office/drawing/2010/main" Requires="a14">
+        <mc:AlternateContent xmlns:mc="http://schemas.openxmlformats.org/markup-compatibility/2006" xmlns:a14="http://schemas.microsoft.com/office/drawing/2010/main">
+          <mc:Choice Requires="a14">
             <p:sp>
               <p:nvSpPr>
                 <p:cNvPr id="15" name="TextBox 14">
@@ -3190,6 +3146,7 @@
                 </a:bodyPr>
                 <a:lstStyle/>
                 <a:p>
+                  <a:pPr/>
                   <a14:m>
                     <m:oMathPara xmlns:m="http://schemas.openxmlformats.org/officeDocument/2006/math">
                       <m:oMathParaPr>
@@ -3229,7 +3186,7 @@
               </p:txBody>
             </p:sp>
           </mc:Choice>
-          <mc:Fallback>
+          <mc:Fallback xmlns="">
             <p:sp>
               <p:nvSpPr>
                 <p:cNvPr id="15" name="TextBox 14">
@@ -3274,8 +3231,8 @@
             </p:sp>
           </mc:Fallback>
         </mc:AlternateContent>
-        <mc:AlternateContent xmlns:mc="http://schemas.openxmlformats.org/markup-compatibility/2006">
-          <mc:Choice xmlns:a14="http://schemas.microsoft.com/office/drawing/2010/main" Requires="a14">
+        <mc:AlternateContent xmlns:mc="http://schemas.openxmlformats.org/markup-compatibility/2006" xmlns:a14="http://schemas.microsoft.com/office/drawing/2010/main">
+          <mc:Choice Requires="a14">
             <p:sp>
               <p:nvSpPr>
                 <p:cNvPr id="16" name="TextBox 15">
@@ -3304,6 +3261,7 @@
                 </a:bodyPr>
                 <a:lstStyle/>
                 <a:p>
+                  <a:pPr/>
                   <a14:m>
                     <m:oMathPara xmlns:m="http://schemas.openxmlformats.org/officeDocument/2006/math">
                       <m:oMathParaPr>
@@ -3349,7 +3307,7 @@
               </p:txBody>
             </p:sp>
           </mc:Choice>
-          <mc:Fallback>
+          <mc:Fallback xmlns="">
             <p:sp>
               <p:nvSpPr>
                 <p:cNvPr id="16" name="TextBox 15">
@@ -3394,8 +3352,8 @@
             </p:sp>
           </mc:Fallback>
         </mc:AlternateContent>
-        <mc:AlternateContent xmlns:mc="http://schemas.openxmlformats.org/markup-compatibility/2006">
-          <mc:Choice xmlns:a14="http://schemas.microsoft.com/office/drawing/2010/main" Requires="a14">
+        <mc:AlternateContent xmlns:mc="http://schemas.openxmlformats.org/markup-compatibility/2006" xmlns:a14="http://schemas.microsoft.com/office/drawing/2010/main">
+          <mc:Choice Requires="a14">
             <p:sp>
               <p:nvSpPr>
                 <p:cNvPr id="17" name="TextBox 16">
@@ -3424,6 +3382,7 @@
                 </a:bodyPr>
                 <a:lstStyle/>
                 <a:p>
+                  <a:pPr/>
                   <a14:m>
                     <m:oMathPara xmlns:m="http://schemas.openxmlformats.org/officeDocument/2006/math">
                       <m:oMathParaPr>
@@ -3450,7 +3409,7 @@
               </p:txBody>
             </p:sp>
           </mc:Choice>
-          <mc:Fallback>
+          <mc:Fallback xmlns="">
             <p:sp>
               <p:nvSpPr>
                 <p:cNvPr id="17" name="TextBox 16">
@@ -3495,8 +3454,8 @@
             </p:sp>
           </mc:Fallback>
         </mc:AlternateContent>
-        <mc:AlternateContent xmlns:mc="http://schemas.openxmlformats.org/markup-compatibility/2006">
-          <mc:Choice xmlns:a14="http://schemas.microsoft.com/office/drawing/2010/main" Requires="a14">
+        <mc:AlternateContent xmlns:mc="http://schemas.openxmlformats.org/markup-compatibility/2006" xmlns:a14="http://schemas.microsoft.com/office/drawing/2010/main">
+          <mc:Choice Requires="a14">
             <p:sp>
               <p:nvSpPr>
                 <p:cNvPr id="18" name="TextBox 17">
@@ -3525,6 +3484,7 @@
                 </a:bodyPr>
                 <a:lstStyle/>
                 <a:p>
+                  <a:pPr/>
                   <a14:m>
                     <m:oMathPara xmlns:m="http://schemas.openxmlformats.org/officeDocument/2006/math">
                       <m:oMathParaPr>
@@ -3545,7 +3505,7 @@
               </p:txBody>
             </p:sp>
           </mc:Choice>
-          <mc:Fallback>
+          <mc:Fallback xmlns="">
             <p:sp>
               <p:nvSpPr>
                 <p:cNvPr id="18" name="TextBox 17">
@@ -3590,8 +3550,8 @@
             </p:sp>
           </mc:Fallback>
         </mc:AlternateContent>
-        <mc:AlternateContent xmlns:mc="http://schemas.openxmlformats.org/markup-compatibility/2006">
-          <mc:Choice xmlns:a14="http://schemas.microsoft.com/office/drawing/2010/main" Requires="a14">
+        <mc:AlternateContent xmlns:mc="http://schemas.openxmlformats.org/markup-compatibility/2006" xmlns:a14="http://schemas.microsoft.com/office/drawing/2010/main">
+          <mc:Choice Requires="a14">
             <p:sp>
               <p:nvSpPr>
                 <p:cNvPr id="21" name="TextBox 20">
@@ -3620,6 +3580,7 @@
                 </a:bodyPr>
                 <a:lstStyle/>
                 <a:p>
+                  <a:pPr/>
                   <a14:m>
                     <m:oMathPara xmlns:m="http://schemas.openxmlformats.org/officeDocument/2006/math">
                       <m:oMathParaPr>
@@ -3665,7 +3626,7 @@
               </p:txBody>
             </p:sp>
           </mc:Choice>
-          <mc:Fallback>
+          <mc:Fallback xmlns="">
             <p:sp>
               <p:nvSpPr>
                 <p:cNvPr id="21" name="TextBox 20">
@@ -3710,8 +3671,8 @@
             </p:sp>
           </mc:Fallback>
         </mc:AlternateContent>
-        <mc:AlternateContent xmlns:mc="http://schemas.openxmlformats.org/markup-compatibility/2006">
-          <mc:Choice xmlns:a14="http://schemas.microsoft.com/office/drawing/2010/main" Requires="a14">
+        <mc:AlternateContent xmlns:mc="http://schemas.openxmlformats.org/markup-compatibility/2006" xmlns:a14="http://schemas.microsoft.com/office/drawing/2010/main">
+          <mc:Choice Requires="a14">
             <p:sp>
               <p:nvSpPr>
                 <p:cNvPr id="22" name="TextBox 21">
@@ -3740,6 +3701,7 @@
                 </a:bodyPr>
                 <a:lstStyle/>
                 <a:p>
+                  <a:pPr/>
                   <a14:m>
                     <m:oMathPara xmlns:m="http://schemas.openxmlformats.org/officeDocument/2006/math">
                       <m:oMathParaPr>
@@ -3791,7 +3753,7 @@
               </p:txBody>
             </p:sp>
           </mc:Choice>
-          <mc:Fallback>
+          <mc:Fallback xmlns="">
             <p:sp>
               <p:nvSpPr>
                 <p:cNvPr id="22" name="TextBox 21">
@@ -3990,6 +3952,92 @@
             </a:p>
           </p:txBody>
         </p:sp>
+        <p:cxnSp>
+          <p:nvCxnSpPr>
+            <p:cNvPr id="6" name="Straight Connector 5">
+              <a:extLst>
+                <a:ext uri="{FF2B5EF4-FFF2-40B4-BE49-F238E27FC236}">
+                  <a16:creationId xmlns:a16="http://schemas.microsoft.com/office/drawing/2014/main" id="{A9B8FDD6-D56F-87F2-7A6E-B22D8EE5DFA9}"/>
+                </a:ext>
+              </a:extLst>
+            </p:cNvPr>
+            <p:cNvCxnSpPr>
+              <a:cxnSpLocks/>
+            </p:cNvCxnSpPr>
+            <p:nvPr/>
+          </p:nvCxnSpPr>
+          <p:spPr>
+            <a:xfrm>
+              <a:off x="1750740" y="2411808"/>
+              <a:ext cx="3600000" cy="0"/>
+            </a:xfrm>
+            <a:prstGeom prst="line">
+              <a:avLst/>
+            </a:prstGeom>
+            <a:ln>
+              <a:solidFill>
+                <a:schemeClr val="tx1"/>
+              </a:solidFill>
+            </a:ln>
+          </p:spPr>
+          <p:style>
+            <a:lnRef idx="2">
+              <a:schemeClr val="accent1"/>
+            </a:lnRef>
+            <a:fillRef idx="0">
+              <a:schemeClr val="accent1"/>
+            </a:fillRef>
+            <a:effectRef idx="1">
+              <a:schemeClr val="accent1"/>
+            </a:effectRef>
+            <a:fontRef idx="minor">
+              <a:schemeClr val="tx1"/>
+            </a:fontRef>
+          </p:style>
+        </p:cxnSp>
+        <p:cxnSp>
+          <p:nvCxnSpPr>
+            <p:cNvPr id="7" name="Straight Connector 6">
+              <a:extLst>
+                <a:ext uri="{FF2B5EF4-FFF2-40B4-BE49-F238E27FC236}">
+                  <a16:creationId xmlns:a16="http://schemas.microsoft.com/office/drawing/2014/main" id="{1358BA93-C066-AFA1-B2CA-E9E3BF4965AA}"/>
+                </a:ext>
+              </a:extLst>
+            </p:cNvPr>
+            <p:cNvCxnSpPr>
+              <a:cxnSpLocks/>
+            </p:cNvCxnSpPr>
+            <p:nvPr/>
+          </p:nvCxnSpPr>
+          <p:spPr>
+            <a:xfrm>
+              <a:off x="3550740" y="624000"/>
+              <a:ext cx="0" cy="3600000"/>
+            </a:xfrm>
+            <a:prstGeom prst="line">
+              <a:avLst/>
+            </a:prstGeom>
+            <a:ln>
+              <a:solidFill>
+                <a:schemeClr val="tx1"/>
+              </a:solidFill>
+            </a:ln>
+          </p:spPr>
+          <p:style>
+            <a:lnRef idx="2">
+              <a:schemeClr val="accent1"/>
+            </a:lnRef>
+            <a:fillRef idx="0">
+              <a:schemeClr val="accent1"/>
+            </a:fillRef>
+            <a:effectRef idx="1">
+              <a:schemeClr val="accent1"/>
+            </a:effectRef>
+            <a:fontRef idx="minor">
+              <a:schemeClr val="tx1"/>
+            </a:fontRef>
+          </p:style>
+        </p:cxnSp>
       </p:grpSp>
     </p:spTree>
     <p:extLst>
@@ -4320,6 +4368,23 @@
 </file>
 
 <file path=customXml/item1.xml><?xml version="1.0" encoding="utf-8"?>
+<p:properties xmlns:p="http://schemas.microsoft.com/office/2006/metadata/properties" xmlns:xsi="http://www.w3.org/2001/XMLSchema-instance" xmlns:pc="http://schemas.microsoft.com/office/infopath/2007/PartnerControls">
+  <documentManagement>
+    <_activity xmlns="02cf8272-43b7-4a92-b486-ec80984c6216" xsi:nil="true"/>
+  </documentManagement>
+</p:properties>
+</file>
+
+<file path=customXml/item2.xml><?xml version="1.0" encoding="utf-8"?>
+<?mso-contentType ?>
+<FormTemplates xmlns="http://schemas.microsoft.com/sharepoint/v3/contenttype/forms">
+  <Display>DocumentLibraryForm</Display>
+  <Edit>DocumentLibraryForm</Edit>
+  <New>DocumentLibraryForm</New>
+</FormTemplates>
+</file>
+
+<file path=customXml/item3.xml><?xml version="1.0" encoding="utf-8"?>
 <ct:contentTypeSchema xmlns:ct="http://schemas.microsoft.com/office/2006/metadata/contentType" xmlns:ma="http://schemas.microsoft.com/office/2006/metadata/properties/metaAttributes" ct:_="" ma:_="" ma:contentTypeName="Document" ma:contentTypeID="0x01010036F76FEFA16F1C419D6262AE0792B1CF" ma:contentTypeVersion="18" ma:contentTypeDescription="Create a new document." ma:contentTypeScope="" ma:versionID="3aac7f604abf90be2ec7acacff5f95b2">
   <xsd:schema xmlns:xsd="http://www.w3.org/2001/XMLSchema" xmlns:xs="http://www.w3.org/2001/XMLSchema" xmlns:p="http://schemas.microsoft.com/office/2006/metadata/properties" xmlns:ns3="02cf8272-43b7-4a92-b486-ec80984c6216" xmlns:ns4="8bfe0132-504a-46c8-821f-c6a64d88f44d" targetNamespace="http://schemas.microsoft.com/office/2006/metadata/properties" ma:root="true" ma:fieldsID="fab8b4598dffc87916f241e46810f011" ns3:_="" ns4:_="">
     <xsd:import namespace="02cf8272-43b7-4a92-b486-ec80984c6216"/>
@@ -4572,24 +4637,32 @@
 </ct:contentTypeSchema>
 </file>
 
-<file path=customXml/item2.xml><?xml version="1.0" encoding="utf-8"?>
-<?mso-contentType ?>
-<FormTemplates xmlns="http://schemas.microsoft.com/sharepoint/v3/contenttype/forms">
-  <Display>DocumentLibraryForm</Display>
-  <Edit>DocumentLibraryForm</Edit>
-  <New>DocumentLibraryForm</New>
-</FormTemplates>
+<file path=customXml/itemProps1.xml><?xml version="1.0" encoding="utf-8"?>
+<ds:datastoreItem xmlns:ds="http://schemas.openxmlformats.org/officeDocument/2006/customXml" ds:itemID="{FFA18306-0838-449E-8D9A-C66D1D8C736A}">
+  <ds:schemaRefs>
+    <ds:schemaRef ds:uri="02cf8272-43b7-4a92-b486-ec80984c6216"/>
+    <ds:schemaRef ds:uri="http://schemas.microsoft.com/office/2006/documentManagement/types"/>
+    <ds:schemaRef ds:uri="8bfe0132-504a-46c8-821f-c6a64d88f44d"/>
+    <ds:schemaRef ds:uri="http://schemas.microsoft.com/office/2006/metadata/properties"/>
+    <ds:schemaRef ds:uri="http://purl.org/dc/dcmitype/"/>
+    <ds:schemaRef ds:uri="http://purl.org/dc/terms/"/>
+    <ds:schemaRef ds:uri="http://purl.org/dc/elements/1.1/"/>
+    <ds:schemaRef ds:uri="http://schemas.microsoft.com/office/infopath/2007/PartnerControls"/>
+    <ds:schemaRef ds:uri="http://schemas.openxmlformats.org/package/2006/metadata/core-properties"/>
+    <ds:schemaRef ds:uri="http://www.w3.org/XML/1998/namespace"/>
+  </ds:schemaRefs>
+</ds:datastoreItem>
 </file>
 
-<file path=customXml/item3.xml><?xml version="1.0" encoding="utf-8"?>
-<p:properties xmlns:p="http://schemas.microsoft.com/office/2006/metadata/properties" xmlns:xsi="http://www.w3.org/2001/XMLSchema-instance" xmlns:pc="http://schemas.microsoft.com/office/infopath/2007/PartnerControls">
-  <documentManagement>
-    <_activity xmlns="02cf8272-43b7-4a92-b486-ec80984c6216" xsi:nil="true"/>
-  </documentManagement>
-</p:properties>
+<file path=customXml/itemProps2.xml><?xml version="1.0" encoding="utf-8"?>
+<ds:datastoreItem xmlns:ds="http://schemas.openxmlformats.org/officeDocument/2006/customXml" ds:itemID="{929942EC-94FE-4834-AD7C-B634C53FC920}">
+  <ds:schemaRefs>
+    <ds:schemaRef ds:uri="http://schemas.microsoft.com/sharepoint/v3/contenttype/forms"/>
+  </ds:schemaRefs>
+</ds:datastoreItem>
 </file>
 
-<file path=customXml/itemProps1.xml><?xml version="1.0" encoding="utf-8"?>
+<file path=customXml/itemProps3.xml><?xml version="1.0" encoding="utf-8"?>
 <ds:datastoreItem xmlns:ds="http://schemas.openxmlformats.org/officeDocument/2006/customXml" ds:itemID="{5E423255-678E-4732-A190-B2C8366BBF33}">
   <ds:schemaRefs>
     <ds:schemaRef ds:uri="http://schemas.microsoft.com/office/2006/metadata/contentType"/>
@@ -4606,29 +4679,4 @@
     <ds:schemaRef ds:uri="http://schemas.microsoft.com/internal/obd"/>
   </ds:schemaRefs>
 </ds:datastoreItem>
-</file>
-
-<file path=customXml/itemProps2.xml><?xml version="1.0" encoding="utf-8"?>
-<ds:datastoreItem xmlns:ds="http://schemas.openxmlformats.org/officeDocument/2006/customXml" ds:itemID="{929942EC-94FE-4834-AD7C-B634C53FC920}">
-  <ds:schemaRefs>
-    <ds:schemaRef ds:uri="http://schemas.microsoft.com/sharepoint/v3/contenttype/forms"/>
-  </ds:schemaRefs>
-</ds:datastoreItem>
-</file>
-
-<file path=customXml/itemProps3.xml><?xml version="1.0" encoding="utf-8"?>
-<ds:datastoreItem xmlns:ds="http://schemas.openxmlformats.org/officeDocument/2006/customXml" ds:itemID="{FFA18306-0838-449E-8D9A-C66D1D8C736A}">
-  <ds:schemaRefs>
-    <ds:schemaRef ds:uri="02cf8272-43b7-4a92-b486-ec80984c6216"/>
-    <ds:schemaRef ds:uri="http://schemas.microsoft.com/office/2006/documentManagement/types"/>
-    <ds:schemaRef ds:uri="8bfe0132-504a-46c8-821f-c6a64d88f44d"/>
-    <ds:schemaRef ds:uri="http://schemas.microsoft.com/office/2006/metadata/properties"/>
-    <ds:schemaRef ds:uri="http://purl.org/dc/dcmitype/"/>
-    <ds:schemaRef ds:uri="http://purl.org/dc/terms/"/>
-    <ds:schemaRef ds:uri="http://purl.org/dc/elements/1.1/"/>
-    <ds:schemaRef ds:uri="http://schemas.microsoft.com/office/infopath/2007/PartnerControls"/>
-    <ds:schemaRef ds:uri="http://schemas.openxmlformats.org/package/2006/metadata/core-properties"/>
-    <ds:schemaRef ds:uri="http://www.w3.org/XML/1998/namespace"/>
-  </ds:schemaRefs>
-</ds:datastoreItem>
 </file>